--- a/wada-tue-scoping-review/manuscripts/individual_figures/fig5_severity_bar.pptx
+++ b/wada-tue-scoping-review/manuscripts/individual_figures/fig5_severity_bar.pptx
@@ -3134,8 +3134,8 @@
         </p:blipFill>
         <p:spPr>
           <a:xfrm>
-            <a:off x="1848563" y="914400"/>
-            <a:ext cx="8494568" cy="4572000"/>
+            <a:off x="1855791" y="914400"/>
+            <a:ext cx="8480113" cy="4572000"/>
           </a:xfrm>
           <a:prstGeom prst="rect">
             <a:avLst/>

--- a/wada-tue-scoping-review/manuscripts/individual_figures/fig5_severity_bar.pptx
+++ b/wada-tue-scoping-review/manuscripts/individual_figures/fig5_severity_bar.pptx
@@ -105,6 +105,398 @@
     </a:lvl9pPr>
   </p:defaultTextStyle>
 </p:presentation>
+</file>
+
+<file path=ppt/charts/chart1.xml><?xml version="1.0" encoding="utf-8"?>
+<c:chartSpace xmlns:c="http://schemas.openxmlformats.org/drawingml/2006/chart" xmlns:a="http://schemas.openxmlformats.org/drawingml/2006/main" xmlns:r="http://schemas.openxmlformats.org/officeDocument/2006/relationships">
+  <c:date1904 val="0"/>
+  <c:chart>
+    <c:autoTitleDeleted val="1"/>
+    <c:plotArea>
+      <c:barChart>
+        <c:barDir val="col"/>
+        <c:grouping val="clustered"/>
+        <c:ser>
+          <c:idx val="0"/>
+          <c:order val="0"/>
+          <c:tx>
+            <c:strRef>
+              <c:f>Sheet1!$B$1</c:f>
+              <c:strCache>
+                <c:ptCount val="1"/>
+                <c:pt idx="0">
+                  <c:v>First-line Rx Prohibited</c:v>
+                </c:pt>
+              </c:strCache>
+            </c:strRef>
+          </c:tx>
+          <c:spPr>
+            <a:solidFill>
+              <a:srgbClr val="EF5350"/>
+            </a:solidFill>
+          </c:spPr>
+          <c:cat>
+            <c:strRef>
+              <c:f>Sheet1!$A$2:$A$8</c:f>
+              <c:strCache>
+                <c:ptCount val="7"/>
+                <c:pt idx="0">
+                  <c:v>Male
+Hypogonadism</c:v>
+                </c:pt>
+                <c:pt idx="1">
+                  <c:v>ADHD</c:v>
+                </c:pt>
+                <c:pt idx="2">
+                  <c:v>PMOS /
+Fertility</c:v>
+                </c:pt>
+                <c:pt idx="3">
+                  <c:v>Cardiovascular</c:v>
+                </c:pt>
+                <c:pt idx="4">
+                  <c:v>Glucocorticoids</c:v>
+                </c:pt>
+                <c:pt idx="5">
+                  <c:v>Asthma</c:v>
+                </c:pt>
+                <c:pt idx="6">
+                  <c:v>Type 2 Diabetes
+/ GLP-1 RA</c:v>
+                </c:pt>
+              </c:strCache>
+            </c:strRef>
+          </c:cat>
+          <c:val>
+            <c:numRef>
+              <c:f>Sheet1!$B$2:$B$8</c:f>
+              <c:numCache>
+                <c:formatCode>General</c:formatCode>
+                <c:ptCount val="7"/>
+                <c:pt idx="0">
+                  <c:v>4.0</c:v>
+                </c:pt>
+                <c:pt idx="1">
+                  <c:v>4.0</c:v>
+                </c:pt>
+                <c:pt idx="2">
+                  <c:v>4.0</c:v>
+                </c:pt>
+                <c:pt idx="3">
+                  <c:v>3.0</c:v>
+                </c:pt>
+                <c:pt idx="4">
+                  <c:v>3.0</c:v>
+                </c:pt>
+                <c:pt idx="5">
+                  <c:v>2.0</c:v>
+                </c:pt>
+                <c:pt idx="6">
+                  <c:v>1.0</c:v>
+                </c:pt>
+              </c:numCache>
+            </c:numRef>
+          </c:val>
+        </c:ser>
+        <c:ser>
+          <c:idx val="1"/>
+          <c:order val="1"/>
+          <c:tx>
+            <c:strRef>
+              <c:f>Sheet1!$C$1</c:f>
+              <c:strCache>
+                <c:ptCount val="1"/>
+                <c:pt idx="0">
+                  <c:v>TUE Process Complexity</c:v>
+                </c:pt>
+              </c:strCache>
+            </c:strRef>
+          </c:tx>
+          <c:spPr>
+            <a:solidFill>
+              <a:srgbClr val="FF9800"/>
+            </a:solidFill>
+          </c:spPr>
+          <c:cat>
+            <c:strRef>
+              <c:f>Sheet1!$A$2:$A$8</c:f>
+              <c:strCache>
+                <c:ptCount val="7"/>
+                <c:pt idx="0">
+                  <c:v>Male
+Hypogonadism</c:v>
+                </c:pt>
+                <c:pt idx="1">
+                  <c:v>ADHD</c:v>
+                </c:pt>
+                <c:pt idx="2">
+                  <c:v>PMOS /
+Fertility</c:v>
+                </c:pt>
+                <c:pt idx="3">
+                  <c:v>Cardiovascular</c:v>
+                </c:pt>
+                <c:pt idx="4">
+                  <c:v>Glucocorticoids</c:v>
+                </c:pt>
+                <c:pt idx="5">
+                  <c:v>Asthma</c:v>
+                </c:pt>
+                <c:pt idx="6">
+                  <c:v>Type 2 Diabetes
+/ GLP-1 RA</c:v>
+                </c:pt>
+              </c:strCache>
+            </c:strRef>
+          </c:cat>
+          <c:val>
+            <c:numRef>
+              <c:f>Sheet1!$C$2:$C$8</c:f>
+              <c:numCache>
+                <c:formatCode>General</c:formatCode>
+                <c:ptCount val="7"/>
+                <c:pt idx="0">
+                  <c:v>4.0</c:v>
+                </c:pt>
+                <c:pt idx="1">
+                  <c:v>4.0</c:v>
+                </c:pt>
+                <c:pt idx="2">
+                  <c:v>3.0</c:v>
+                </c:pt>
+                <c:pt idx="3">
+                  <c:v>3.0</c:v>
+                </c:pt>
+                <c:pt idx="4">
+                  <c:v>2.0</c:v>
+                </c:pt>
+                <c:pt idx="5">
+                  <c:v>2.0</c:v>
+                </c:pt>
+                <c:pt idx="6">
+                  <c:v>2.0</c:v>
+                </c:pt>
+              </c:numCache>
+            </c:numRef>
+          </c:val>
+        </c:ser>
+        <c:ser>
+          <c:idx val="2"/>
+          <c:order val="2"/>
+          <c:tx>
+            <c:strRef>
+              <c:f>Sheet1!$D$1</c:f>
+              <c:strCache>
+                <c:ptCount val="1"/>
+                <c:pt idx="0">
+                  <c:v>Guideline Update Lag</c:v>
+                </c:pt>
+              </c:strCache>
+            </c:strRef>
+          </c:tx>
+          <c:spPr>
+            <a:solidFill>
+              <a:srgbClr val="FDD835"/>
+            </a:solidFill>
+          </c:spPr>
+          <c:cat>
+            <c:strRef>
+              <c:f>Sheet1!$A$2:$A$8</c:f>
+              <c:strCache>
+                <c:ptCount val="7"/>
+                <c:pt idx="0">
+                  <c:v>Male
+Hypogonadism</c:v>
+                </c:pt>
+                <c:pt idx="1">
+                  <c:v>ADHD</c:v>
+                </c:pt>
+                <c:pt idx="2">
+                  <c:v>PMOS /
+Fertility</c:v>
+                </c:pt>
+                <c:pt idx="3">
+                  <c:v>Cardiovascular</c:v>
+                </c:pt>
+                <c:pt idx="4">
+                  <c:v>Glucocorticoids</c:v>
+                </c:pt>
+                <c:pt idx="5">
+                  <c:v>Asthma</c:v>
+                </c:pt>
+                <c:pt idx="6">
+                  <c:v>Type 2 Diabetes
+/ GLP-1 RA</c:v>
+                </c:pt>
+              </c:strCache>
+            </c:strRef>
+          </c:cat>
+          <c:val>
+            <c:numRef>
+              <c:f>Sheet1!$D$2:$D$8</c:f>
+              <c:numCache>
+                <c:formatCode>General</c:formatCode>
+                <c:ptCount val="7"/>
+                <c:pt idx="0">
+                  <c:v>3.0</c:v>
+                </c:pt>
+                <c:pt idx="1">
+                  <c:v>2.0</c:v>
+                </c:pt>
+                <c:pt idx="2">
+                  <c:v>2.0</c:v>
+                </c:pt>
+                <c:pt idx="3">
+                  <c:v>3.0</c:v>
+                </c:pt>
+                <c:pt idx="4">
+                  <c:v>2.0</c:v>
+                </c:pt>
+                <c:pt idx="5">
+                  <c:v>2.0</c:v>
+                </c:pt>
+                <c:pt idx="6">
+                  <c:v>3.0</c:v>
+                </c:pt>
+              </c:numCache>
+            </c:numRef>
+          </c:val>
+        </c:ser>
+        <c:ser>
+          <c:idx val="3"/>
+          <c:order val="3"/>
+          <c:tx>
+            <c:strRef>
+              <c:f>Sheet1!$E$1</c:f>
+              <c:strCache>
+                <c:ptCount val="1"/>
+                <c:pt idx="0">
+                  <c:v>Athlete Impact</c:v>
+                </c:pt>
+              </c:strCache>
+            </c:strRef>
+          </c:tx>
+          <c:spPr>
+            <a:solidFill>
+              <a:srgbClr val="42A5F5"/>
+            </a:solidFill>
+          </c:spPr>
+          <c:cat>
+            <c:strRef>
+              <c:f>Sheet1!$A$2:$A$8</c:f>
+              <c:strCache>
+                <c:ptCount val="7"/>
+                <c:pt idx="0">
+                  <c:v>Male
+Hypogonadism</c:v>
+                </c:pt>
+                <c:pt idx="1">
+                  <c:v>ADHD</c:v>
+                </c:pt>
+                <c:pt idx="2">
+                  <c:v>PMOS /
+Fertility</c:v>
+                </c:pt>
+                <c:pt idx="3">
+                  <c:v>Cardiovascular</c:v>
+                </c:pt>
+                <c:pt idx="4">
+                  <c:v>Glucocorticoids</c:v>
+                </c:pt>
+                <c:pt idx="5">
+                  <c:v>Asthma</c:v>
+                </c:pt>
+                <c:pt idx="6">
+                  <c:v>Type 2 Diabetes
+/ GLP-1 RA</c:v>
+                </c:pt>
+              </c:strCache>
+            </c:strRef>
+          </c:cat>
+          <c:val>
+            <c:numRef>
+              <c:f>Sheet1!$E$2:$E$8</c:f>
+              <c:numCache>
+                <c:formatCode>General</c:formatCode>
+                <c:ptCount val="7"/>
+                <c:pt idx="0">
+                  <c:v>4.0</c:v>
+                </c:pt>
+                <c:pt idx="1">
+                  <c:v>4.0</c:v>
+                </c:pt>
+                <c:pt idx="2">
+                  <c:v>3.0</c:v>
+                </c:pt>
+                <c:pt idx="3">
+                  <c:v>3.0</c:v>
+                </c:pt>
+                <c:pt idx="4">
+                  <c:v>3.0</c:v>
+                </c:pt>
+                <c:pt idx="5">
+                  <c:v>3.0</c:v>
+                </c:pt>
+                <c:pt idx="6">
+                  <c:v>3.0</c:v>
+                </c:pt>
+              </c:numCache>
+            </c:numRef>
+          </c:val>
+        </c:ser>
+        <c:axId val="-2068027336"/>
+        <c:axId val="-2113994440"/>
+      </c:barChart>
+      <c:catAx>
+        <c:axId val="-2068027336"/>
+        <c:scaling>
+          <c:orientation val="minMax"/>
+        </c:scaling>
+        <c:delete val="0"/>
+        <c:axPos val="b"/>
+        <c:majorTickMark val="out"/>
+        <c:minorTickMark val="none"/>
+        <c:tickLblPos val="nextTo"/>
+        <c:crossAx val="-2113994440"/>
+        <c:crosses val="autoZero"/>
+        <c:auto val="1"/>
+        <c:lblAlgn val="ctr"/>
+        <c:lblOffset val="100"/>
+        <c:noMultiLvlLbl val="0"/>
+      </c:catAx>
+      <c:valAx>
+        <c:axId val="-2113994440"/>
+        <c:scaling>
+          <c:max val="4.5"/>
+          <c:min val="0.0"/>
+        </c:scaling>
+        <c:delete val="0"/>
+        <c:axPos val="l"/>
+        <c:majorGridlines/>
+        <c:majorTickMark val="out"/>
+        <c:minorTickMark val="none"/>
+        <c:tickLblPos val="nextTo"/>
+        <c:crossAx val="-2068027336"/>
+        <c:crosses val="autoZero"/>
+        <c:majorUnit val="1.0"/>
+      </c:valAx>
+    </c:plotArea>
+    <c:dispBlanksAs val="gap"/>
+  </c:chart>
+  <c:txPr>
+    <a:bodyPr/>
+    <a:lstStyle/>
+    <a:p>
+      <a:pPr>
+        <a:defRPr sz="1800"/>
+      </a:pPr>
+      <a:endParaRPr lang="en-US"/>
+    </a:p>
+  </c:txPr>
+  <c:externalData r:id="rId1">
+    <c:autoUpdate val="0"/>
+  </c:externalData>
+</c:chartSpace>
 </file>
 
 <file path=ppt/slideLayouts/slideLayout1.xml><?xml version="1.0" encoding="utf-8"?>
@@ -3088,90 +3480,24 @@
         <p:nvPr/>
       </p:nvGrpSpPr>
       <p:grpSpPr/>
-      <p:sp>
-        <p:nvSpPr>
-          <p:cNvPr id="2" name="TextBox 1"/>
-          <p:cNvSpPr txBox="1"/>
+      <p:graphicFrame>
+        <p:nvGraphicFramePr>
+          <p:cNvPr id="3" name="Chart 2"/>
+          <p:cNvGraphicFramePr>
+            <a:graphicFrameLocks noGrp="1"/>
+          </p:cNvGraphicFramePr>
           <p:nvPr/>
-        </p:nvSpPr>
-        <p:spPr>
-          <a:xfrm>
-            <a:off x="457200" y="182880"/>
-            <a:ext cx="11247120" cy="548640"/>
-          </a:xfrm>
-          <a:prstGeom prst="rect">
-            <a:avLst/>
-          </a:prstGeom>
-          <a:noFill/>
-        </p:spPr>
-        <p:txBody>
-          <a:bodyPr wrap="square">
-            <a:spAutoFit/>
-          </a:bodyPr>
-          <a:lstStyle/>
-          <a:p>
-            <a:pPr algn="ctr"/>
-            <a:r>
-              <a:rPr b="1" sz="2400"/>
-              <a:t>Figure 5</a:t>
-            </a:r>
-          </a:p>
-        </p:txBody>
-      </p:sp>
-      <p:pic>
-        <p:nvPicPr>
-          <p:cNvPr id="3" name="Picture 2" descr="fig5_severity_bar.png"/>
-          <p:cNvPicPr>
-            <a:picLocks noChangeAspect="1"/>
-          </p:cNvPicPr>
-          <p:nvPr/>
-        </p:nvPicPr>
-        <p:blipFill>
-          <a:blip r:embed="rId2"/>
-          <a:stretch>
-            <a:fillRect/>
-          </a:stretch>
-        </p:blipFill>
-        <p:spPr>
-          <a:xfrm>
-            <a:off x="1855791" y="914400"/>
-            <a:ext cx="8480113" cy="4572000"/>
-          </a:xfrm>
-          <a:prstGeom prst="rect">
-            <a:avLst/>
-          </a:prstGeom>
-        </p:spPr>
-      </p:pic>
-      <p:sp>
-        <p:nvSpPr>
-          <p:cNvPr id="4" name="TextBox 3"/>
-          <p:cNvSpPr txBox="1"/>
-          <p:nvPr/>
-        </p:nvSpPr>
-        <p:spPr>
-          <a:xfrm>
-            <a:off x="457200" y="5943600"/>
-            <a:ext cx="11247120" cy="731520"/>
-          </a:xfrm>
-          <a:prstGeom prst="rect">
-            <a:avLst/>
-          </a:prstGeom>
-          <a:noFill/>
-        </p:spPr>
-        <p:txBody>
-          <a:bodyPr wrap="square">
-            <a:spAutoFit/>
-          </a:bodyPr>
-          <a:lstStyle/>
-          <a:p>
-            <a:pPr algn="ctr"/>
-            <a:r>
-              <a:rPr sz="1400" i="1"/>
-              <a:t>Figure 5. Clinical-competition gap severity by disease area and assessment dimension.</a:t>
-            </a:r>
-          </a:p>
-        </p:txBody>
-      </p:sp>
+        </p:nvGraphicFramePr>
+        <p:xfrm>
+          <a:off x="731520" y="914400"/>
+          <a:ext cx="10515600" cy="5029200"/>
+        </p:xfrm>
+        <a:graphic>
+          <a:graphicData uri="http://schemas.openxmlformats.org/drawingml/2006/chart">
+            <c:chart xmlns:c="http://schemas.openxmlformats.org/drawingml/2006/chart" r:id="rId2"/>
+          </a:graphicData>
+        </a:graphic>
+      </p:graphicFrame>
     </p:spTree>
   </p:cSld>
   <p:clrMapOvr>

--- a/wada-tue-scoping-review/manuscripts/individual_figures/fig5_severity_bar.pptx
+++ b/wada-tue-scoping-review/manuscripts/individual_figures/fig5_severity_bar.pptx
@@ -481,6 +481,9 @@
         <c:majorUnit val="1.0"/>
       </c:valAx>
     </c:plotArea>
+    <c:legend>
+      <c:overlay val="0"/>
+    </c:legend>
     <c:dispBlanksAs val="gap"/>
   </c:chart>
   <c:txPr>
